--- a/presentations/research-cisco-sdwan/Research_Cisco_SDWAN.pptx
+++ b/presentations/research-cisco-sdwan/Research_Cisco_SDWAN.pptx
@@ -130,13 +130,13 @@
   <p:extLst>
     <p:ext uri="{521415D9-36F7-43E2-AB2F-B90AF26B5E84}">
       <p14:sectionLst xmlns:p14="http://schemas.microsoft.com/office/powerpoint/2010/main">
-        <p14:section name="Orientation" id="{bba48cca-421c-2c50-73f2-ecd08b4014cb}">
+        <p14:section name="Orientation" id="{6c2a8cfb-3113-10cb-5dd2-c606a576b049}">
           <p14:sldIdLst>
             <p14:sldId id="256"/>
             <p14:sldId id="257"/>
           </p14:sldIdLst>
         </p14:section>
-        <p14:section name="Gate 0" id="{52b7aead-2a5e-995e-b107-6afad2ec8989}">
+        <p14:section name="Gate 0" id="{4f1015ae-684e-e3b0-61d3-75a4967e6b96}">
           <p14:sldIdLst>
             <p14:sldId id="258"/>
             <p14:sldId id="259"/>
@@ -144,27 +144,27 @@
             <p14:sldId id="261"/>
           </p14:sldIdLst>
         </p14:section>
-        <p14:section name="Build" id="{15c249c0-3cb3-8f90-98fa-c8822f543922}">
+        <p14:section name="Build" id="{b2dd893f-7853-e94c-0f50-081daec1000f}">
           <p14:sldIdLst>
             <p14:sldId id="262"/>
             <p14:sldId id="263"/>
             <p14:sldId id="264"/>
           </p14:sldIdLst>
         </p14:section>
-        <p14:section name="Harden" id="{505686f3-19ed-c31d-5b06-acca94c5b44e}">
+        <p14:section name="Harden" id="{a0b40787-416a-c424-0e9d-82b6b6f54760}">
           <p14:sldIdLst>
             <p14:sldId id="265"/>
             <p14:sldId id="266"/>
             <p14:sldId id="267"/>
           </p14:sldIdLst>
         </p14:section>
-        <p14:section name="Integrate" id="{e1c9df8a-572b-4063-8d69-887bba869fde}">
+        <p14:section name="Integrate" id="{b635a97d-7126-206d-578a-09a11044b745}">
           <p14:sldIdLst>
             <p14:sldId id="268"/>
             <p14:sldId id="269"/>
           </p14:sldIdLst>
         </p14:section>
-        <p14:section name="Evidence and plan" id="{2eb22d34-24df-c9f5-a4f8-5dd0a8dab275}">
+        <p14:section name="Evidence and plan" id="{42197c7e-d8d1-2fb6-729c-093823aedb70}">
           <p14:sldIdLst>
             <p14:sldId id="270"/>
             <p14:sldId id="271"/>
@@ -172,13 +172,13 @@
             <p14:sldId id="273"/>
           </p14:sldIdLst>
         </p14:section>
-        <p14:section name="Close" id="{4a41ed6a-8114-fc42-f673-f2c89eef0530}">
+        <p14:section name="Close" id="{a9e113b6-878c-7edf-47f6-5acd06625e22}">
           <p14:sldIdLst>
             <p14:sldId id="274"/>
             <p14:sldId id="275"/>
           </p14:sldIdLst>
         </p14:section>
-        <p14:section name="Backup" id="{8a46f752-c2ff-525e-8770-5778b65a4d4e}">
+        <p14:section name="Backup" id="{b09fb9f2-056f-c9b3-c2bc-eabc4f19c07a}">
           <p14:sldIdLst>
             <p14:sldId id="276"/>
             <p14:sldId id="277"/>
@@ -860,9 +860,9 @@
           <a:p>
             <a:r>
               <a:rPr lang="en-US" dirty="0"/>
-              <a:t>[8:57–9:46]  If an acquisition has to state a FIPS 140-3 expectation, the honest answer has two halves. The control components are in good shape: FIPS mode is on by default on recent releases and in the hosted environment, and Cisco's letter for the current train cites an active FIPS 140-3 module. The edges are different. Their crypto modules are validated, but Cisco's current letters don't name SD-WAN mode, NIAP's router listings don't mention it, and Cisco's own example shows an edge with FIPS mode disabled. So get edge validation in SD-WAN mode as a written vendor commitment before award. There's no SD-WAN STIG either; the router STIGs are a reference baseline, not a checklist. Next, TIC 3.0.
-Detail: Status on October 24, 2026. FIPS mode, control components: on by default from release 20.15.1; on by default in SDWAN-G, verified with show sdwan security-info. FIPS module, control components: Cisco's December 10, 2025 letter for Manager, Validator and Controller 20.18 cites Cisco FIPS Object Module 7.3a, CMVP #4747, FIPS 140-3, active, sunset July 31, 2029. FIPS modules, edges: IOS Common Cryptographic Module CMVP #5356 (FIPS 140-3, active, sunset August 6, 2029; vendor-affirmed for Catalyst 8200, 8200L, 8300, 8500 and 8500L on IOS XE 17.12) and CiscoSSL FIPS Provider #5430 (active, sunset November 17, 2029); Cisco's current letters for these platforms on 17.18 and 26.1 don't name SD-WAN mode; only archived letters, citing FIPS 140-2 certificates now on the Historical list, did. FIPS mode, edges: Cisco's IOS XE 17.x security guide shows example edge output with fips-mode Disabled, and this research found no documented procedure for enabling it on edges (vendor ask 5). Common Criteria (NIAP): Catalyst 8200, 8300, 8400 and 8500 Secure Routers (G2 hardware) on IOS XE 17.18, certified April 9, 2026; Catalyst 8200, 8300 and 8500 with ASR 1000 on 17.15, certified September 29, 2025, maintained to 17.18; protection profiles NDcPP 3.0e, VPN Gateway 1.3, MACsec 1.0 and SSH 1.0. No Cisco SD-WAN product is listed, and the router listings don't mention controller mode. Common Criteria (other): Cisco lists "Cisco cEdge Routers running IOS XE 17.12 with SD-WAN 20.12," EAL2+, certified December 18, 2024, expiring December 18, 2029, issued under the Canadian scheme with no protection profile claimed. DISA STIGs: no SD-WAN STIG exists; the Cisco IOS XE Router NDM STIG V3R7 (April 1, 2026) and RTR STIG V3R5 (October 1, 2025) are written for IOS XE and don't mention SD-WAN mode; use them as a reference baseline for edges, not a checklist an assessor will expect to match (inference). For Chapter 10's requirement that acquisitions state a FIPS 140-3 expectation, the honest statement has two halves: the control plane's module is validated under FIPS 140-3; validation of the edges in SD-WAN mode is a written vendor commitment to obtain before award (design guidance). Chapter 11's BOM names first-generation models (C8200L-1N-4T, C8200-1N-4T, C8300-1N1S-4T2X); the 17.18 NIAP listing covers G2 hardware; confirm which listing covers which model (vendor ask 6). TrustSec isn't supported with FIPS mode on.
-Workbook: Research, Building Book 09's SD-WAN Design on Cisco Catalyst SD-WAN (FIPS 140-3, Common Criteria and STIGs).</a:t>
+              <a:t>[8:57–9:49]  If an acquisition has to state a FIPS 140-3 expectation, the honest answer has two halves. The control components are in good shape: FIPS mode is on by default on recent releases and in the hosted environment, and Cisco's letter for the current train cites an active FIPS 140-3 module. The edges are different. Cisco's current letters don't name SD-WAN mode, and Cisco's own example shows an edge with FIPS mode disabled. So get edge validation in SD-WAN mode as a written vendor commitment before award. For edge hardening, the agency sets its own baseline from the Center for Internet Security benchmark for IOS XE and Cisco's hardening guide. The router STIGs are Defense material, an optional cross-check at most. Next, TIC 3.0.
+Detail: Status on October 24, 2026. FIPS mode, control components: on by default from release 20.15.1; on by default in SDWAN-G, verified with show sdwan security-info. FIPS module, control components: Cisco's December 10, 2025 letter for Manager, Validator and Controller 20.18 cites Cisco FIPS Object Module 7.3a, CMVP #4747, FIPS 140-3, active, sunset July 31, 2029. FIPS modules, edges: IOS Common Cryptographic Module CMVP #5356 (FIPS 140-3, active, sunset August 6, 2029; vendor-affirmed for Catalyst 8200, 8200L, 8300, 8500 and 8500L on IOS XE 17.12) and CiscoSSL FIPS Provider #5430 (active, sunset November 17, 2029); Cisco's current letters for these platforms on 17.18 and 26.1 don't name SD-WAN mode; only archived letters, citing FIPS 140-2 certificates now on the Historical list, did. FIPS mode, edges: Cisco's IOS XE 17.x security guide shows example edge output with fips-mode Disabled, and this research found no documented procedure for enabling it on edges (vendor ask 5). Common Criteria (NIAP): Catalyst 8200, 8300, 8400 and 8500 Secure Routers (G2 hardware) on IOS XE 17.18, certified April 9, 2026; Catalyst 8200, 8300 and 8500 with ASR 1000 on 17.15, certified September 29, 2025, maintained to 17.18; protection profiles NDcPP 3.0e, VPN Gateway 1.3, MACsec 1.0 and SSH 1.0. No Cisco SD-WAN product is listed, and the router listings don't mention controller mode. Common Criteria (other): Cisco lists "Cisco cEdge Routers running IOS XE 17.12 with SD-WAN 20.12," EAL2+, certified December 18, 2024, expiring December 18, 2029, issued under the Canadian scheme with no protection profile claimed. Configuration baseline (CM-6): NIST SP 800-53 CM-6 leaves the agency to choose its common secure configurations and record deviations. For the control components, that's Cisco's Catalyst SD-WAN Hardening Guide and CISA's supplemental guidance. For the edges, draw the settings from the CIS Cisco IOS XE 17.x Benchmark (2.2.1) and Cisco's IOS XE Software Hardening Guide (revision 3.2, December 8, 2025), and check each against SD-WAN mode, in which Manager pushes the edge configuration (design guidance). CIS lists no Catalyst SD-WAN Manager benchmark. DISA STIGs (High only: material for FedRAMP High or Defense environments, not the Moderate civilian baseline; kept as an optional reference): no SD-WAN STIG exists; the Cisco IOS XE Router NDM STIG V3R7 (April 1, 2026) and RTR STIG V3R5 (October 1, 2025) are written for IOS XE and don't mention SD-WAN mode; they're an optional cross-check, not the civilian baseline and not something a Moderate assessor expects to match (inference). For Chapter 10's requirement that acquisitions state a FIPS 140-3 expectation, the honest statement has two halves: the control plane's module is validated under FIPS 140-3; validation of the edges in SD-WAN mode is a written vendor commitment to obtain before award (design guidance). Chapter 11's BOM names first-generation models (C8200L-1N-4T, C8200-1N-4T, C8300-1N1S-4T2X); the 17.18 NIAP listing covers G2 hardware; confirm which listing covers which model (vendor ask 6). TrustSec isn't supported with FIPS mode on.
+Workbook: Research, Building Book 09's SD-WAN Design on Cisco Catalyst SD-WAN (FIPS 140-3, Common Criteria and the configuration baseline).</a:t>
             </a:r>
             <a:endParaRPr lang="en-US" dirty="0"/>
           </a:p>
@@ -950,7 +950,7 @@
           <a:p>
             <a:r>
               <a:rPr lang="en-US" dirty="0"/>
-              <a:t>[9:46–10:38]  Book 09 names four branch egress patterns, and each has a Catalyst build. Pattern A, the hairpin, sends internet traffic to the regional hub, which breaks out through its own security tunnel. That's every office's starting state, and its fallback. Pattern B, bare local breakout, is never allowed, so audit the policy group for it on every change. Pattern C, the reference, is automatic IPsec tunnels from each edge to a security service edge, with Microsoft 365 Optimize traffic going direct only under its exception. Pattern D puts policy in the endpoint agent, and the edge keeps agentless devices on A or C. Cisco's own TIC guide predates the current use case, so build to Book 09's reading. Next, the security service.
+              <a:t>[9:49–10:41]  Book 09 names four branch egress patterns, and each has a Catalyst build. Pattern A, the hairpin, sends internet traffic to the regional hub, which breaks out through its own security tunnel. That's every office's starting state, and its fallback. Pattern B, bare local breakout, is never allowed, so audit the policy group for it on every change. Pattern C, the reference, is automatic IPsec tunnels from each edge to a security service edge, with Microsoft 365 Optimize traffic going direct only under its exception. Pattern D puts policy in the endpoint agent, and the edge keeps agentless devices on A or C. Cisco's own TIC guide predates the current use case, so build to Book 09's reading. Next, the security service.
 Detail: Cisco's own TIC 3.0 Architecture Guide (October 2021) covers the Traditional, Branch Office and Remote User use cases; its branch patterns are backhaul through the campus, direct cloud access and direct internet access, with security on the SD-WAN routers. It predates the September 2026 Branch Office Use Case that Book 09 relies on, and doesn't mention SASE or Cisco Secure Access, so build to Book 09's reading of the current use case rather than to the vendor guide (inference). Book 09's patterns on Catalyst (design guidance; Chapter 08). A, Hairpin: data policy sends internet-bound traffic over the overlay to the regional hub, which breaks out through the hub's SSE tunnel; this is the starting state for every office and the fallback if the SSE is unreachable. B, Bare local breakout: never; no site carries a local-internet action except to an SSE tunnel or a documented Optimize exception; audit the policy group for it on each change. C, Governed local breakout (the reference pattern): automatic IPsec tunnels from each edge to Cisco Secure Access for Government, or to another SSE through the generic SIG tunnel; Microsoft 365 Optimize traffic goes direct only under the SC-7(4) exception (Chapter 12). D, Agent-delivered SASE: the SSE's endpoint agent (Cisco's client for Secure Access, or the Global Secure Access client) carries policy; the edge is transport and path telemetry; the edge still keeps agentless devices on Pattern A or C.
 Workbook: Research, Building Book 09's SD-WAN Design on Cisco Catalyst SD-WAN (TIC 3.0, SSE and Microsoft 365: Book 09's patterns on Catalyst).</a:t>
             </a:r>
@@ -1040,7 +1040,7 @@
           <a:p>
             <a:r>
               <a:rPr lang="en-US" dirty="0"/>
-              <a:t>[10:38–11:28]  For the security service, Cisco's government option is Secure Access for Government, certified at High, with automatic tunnels documented from a Catalyst branch. But it runs in one region, Virginia, and a western office pays that round trip. Measure it in the pilot, or choose a service with nearer points of presence. Microsoft's Global Secure Access is available in GCC, and Catalyst is a listed partner, but Cisco's guide forwards only the Microsoft 365 profile, and Conditional Access applies only to users running the client. So it carries branch Microsoft 365 traffic, not a full Pattern C. And in GCC, informed network routing is still closed, so Microsoft 365 path choice rests on the edge's own probes. Next, evidence.
+              <a:t>[10:41–11:31]  For the security service, Cisco's government option is Secure Access for Government, certified at High, with automatic tunnels documented from a Catalyst branch. But it runs in one region, Virginia, and a western office pays that round trip. Measure it in the pilot, or choose a service with nearer points of presence. Microsoft's Global Secure Access is available in GCC, and Catalyst is a listed partner, but Cisco's guide forwards only the Microsoft 365 profile, and Conditional Access applies only to users running the client. So it carries branch Microsoft 365 traffic, not a full Pattern C. And in GCC, informed network routing is still closed, so Microsoft 365 path choice rests on the edge's own probes. Next, evidence.
 Detail: Cisco Secure Access for Government. Listing: the FedRAMP Marketplace lists Cisco Security Cloud for Government (FR2304757473A) as FedRAMP Certified, Class D (High), certified August 6, 2026; it covers Umbrella for Government and Secure Access for Government and integrates with CISA's Protective DNS. Setup: Cisco's government help center documents automatic tunnels "from a Catalyst SD-WAN branch"; credentials go into SD-WAN Manager under Cloud Credentials (organization ID, API key and secret); the integration was tested on 20.15/17.15 with ISE 3.1 or later. Constraints: the service runs in one region, US (Virginia); tunnel MTU must be 1,390 bytes or less, and fragmented packets are dropped; Cisco's commercial guides add that automated tunnels need 20.15.1/17.15.1 with up to eight tunnel pairs from Manager, and private-access automation needs 20.18.2/17.18.2 and is "on controlled availability," enabled through TAC; whether the government service needs the same TAC step isn't stated (vendor ask 8). Umbrella for Government's current guide lists no Catalyst SD-WAN section; treat Secure Access for Government as Cisco's SSE path for this design (inference). The single region is a physics problem as well as a resilience one: a western office that tunnels to Virginia pays the round trip Chapter 01 prices; measure it and accept it in the pilot, or choose an SSE with PoPs near each office cluster (Chapter 05). The SD-WAN build doesn't depend on which SSE is chosen. Microsoft Global Secure Access: Microsoft says it's available in GCC, but not in GCC High or DoD. Microsoft lists "Cisco Catalyst" as a template-based remote-network partner; Cisco's integration guide uses the generic SIG tunnel and says only the Microsoft 365 traffic forwarding profile can be selected. Remote-network limits: remote networks carry the Microsoft and Internet Access profiles, not Private Access; Conditional Access applies only to users running the client; Custom Bypass doesn't work; 200 remote networks per tenant. So a Catalyst edge can deliver branch Microsoft 365 traffic to Microsoft's SSE; it isn't a full Pattern C to Global Secure Access, and Chapter 12's tenant-restriction analysis still governs (inference). Microsoft 365 in GCC: Microsoft's informed network routing page still says it supports worldwide commercial tenants "but not the GCC Moderate, GCC High, DoD" clouds (Cisco IOS XE SD-WAN 20.4/17.4 or later is the one listed partner). Cloud OnRamp for SaaS can steer Microsoft 365 by Microsoft's categories (Optimize, Optimize and Allow, or All); Microsoft's feedback telemetry starts at 17.4.1a/20.4.1 and can't run on sites that use SIG tunnels. In GCC, Microsoft 365 path choice rests on the edge's own probes, and a Pattern C site loses the telemetry anyway. Book 09's position stands: direct breakout for Optimize traffic under its own exception, application-aware routing on measured paths, and QoS on the overlay (Chapters 11 and 12).
 Workbook: Research, Building Book 09's SD-WAN Design on Cisco Catalyst SD-WAN (Cisco Secure Access for Government; Microsoft Global Secure Access as the SSE; Microsoft 365 in GCC).</a:t>
             </a:r>
@@ -1130,7 +1130,7 @@
           <a:p>
             <a:r>
               <a:rPr lang="en-US" dirty="0"/>
-              <a:t>[11:28–12:13]  Book 09 expects decision records that become boundary-change evidence. On Catalyst, they're derived from the Manager's APIs, and labeled as derived. Device inventory, the audit log, alarms and path statistics give you the controller, the selected path, the SLA state, failovers and the policy references. Logs leave the box over TLS syslog to the SIEM, and all SD-WAN syslog goes to CISA through CLAW. One caveat for Sentinel users. The documented connector's syslog path, through the Azure Monitor Agent, is fine. Its NetFlow path uses an API whose support ended in September. Ingestion continues, but treat that path as legacy. Next, how the build is sequenced.
+              <a:t>[11:31–12:16]  Book 09 expects decision records that become boundary-change evidence. On Catalyst, they're derived from the Manager's APIs, and labeled as derived. Device inventory, the audit log, alarms and path statistics give you the controller, the selected path, the SLA state, failovers and the policy references. Logs leave the box over TLS syslog to the SIEM, and all SD-WAN syslog goes to CISA through CLAW. One caveat for Sentinel users. The documented connector's syslog path, through the Azure Monitor Agent, is fine. Its NetFlow path uses an API whose support ended in September. Ingestion continues, but treat that path as legacy. Next, how the build is sequenced.
 Detail: Manager's APIs. Sign-in from release 20.18.1: JSON web tokens, POST /jwt/login with a username, password and a duration of up to 604,800 seconds (default 1,800); send the token as a bearer header, and the returned csrf value as X-XSRF-TOKEN on POST requests; there's no JWT sign-out, so request short-lived tokens. Earlier releases: POST /j_security_check, then GET /dataservice/client/token, then POST /logout. Reads: device inventory (GET /dataservice/device: host name, system IP, site ID, device type, model, serial, software version, reachability); the Manager audit log (GET /dataservice/auditlog with a query parameter: entry_time, loguser, logusersrcip, logmodule, logfeature, logdeviceid, logmessage, logid, tenant); alarms and path statistics (/dataservice/alarms; /statistics/approute, latency, jitter and loss percentage by tunnel). Mapping to Chapter 05's evidence schema (design guidance; every record is derived and should be labeled so): controller_id from the Manager or Controller system IP, or the fabric name for SDWAN-G; decision_kind path-selection and application-steering from the active application-aware routing and data policy (policy group), joined to application-route statistics for the flow's tunnel; decision_kind failover from alarms and events for TLOC, BFD and control-connection state changes; selected_path from tunnel color and remote TLOC; sla_state from the SLA class the flow matched and whether the path met it; identity_context n/a unless ISE SGTs or identity-firewall users are in play; policy_refs from policy group, data policy and SLA class identifiers, linked to the SC-7(4) traffic-flow policy; evaluation_timestamp from entry_time, converted to ISO 8601. Getting logs off the box: edges and control components send syslog over UDP, TCP or TLS; prefer TLS. Manager aggregates audit, ACL and system logs; firewall high-speed logging exports session records in NetFlow v9. All SD-WAN syslog goes to CLAW. M-26-14's minimum log content (Chapter 13) needs records of source, destination, protocol, port and session; flow export plus firewall high-speed logging is the mechanism (inference). Sentinel: the "Cisco Software Defined WAN" connector, supported by Cisco, has two paths: syslog reaches the Syslog table through the Azure Monitor Agent on an Arc-enabled Linux forwarder; NetFlow and IPFIX go through Filebeat and Logstash, with the workspace key, into CiscoSDWANNetflow_CL, a table with no data collection rule support. Microsoft ended support for the HTTP Data Collector API on September 14, 2026; ingestion continues for TLS 1.2 clients. Syslog through the Azure Monitor Agent is listed as generally available in Azure Government; whether the Cisco solution is in the Azure Government content hub couldn't be confirmed. Treat the NetFlow path as legacy and ask for a data-collection-rule-based one (vendor ask 10).
 Workbook: Research, Building Book 09's SD-WAN Design on Cisco Catalyst SD-WAN (Evidence and telemetry).</a:t>
             </a:r>
@@ -1220,7 +1220,7 @@
           <a:p>
             <a:r>
               <a:rPr lang="en-US" dirty="0"/>
-              <a:t>[12:13–13:01]  The build follows Book 09's own sequence, and each step leaves evidence. Step zero is the gate we've covered. Phase zero, the first six months, decides hosted or on-premises, sets the release baseline, runs a ten-site pilot, and starts the CLAW coordination and the static-address plan. Phase one builds the twelve hubs, with SLA classes set from the pilot's measurements, and no office gets local internet until its security tunnel is up and its boundary change is approved. Phase two moves offices in waves at MPLS renewal, retiring MPLS only after that office's logs reach CLAW. Phase three adds the Microsoft 365 direct path and tracks the five retirement gates. So what does this change?
+              <a:t>[12:16–13:04]  The build follows Book 09's own sequence, and each step leaves evidence. Step zero is the gate we've covered. Phase zero, the first six months, decides hosted or on-premises, sets the release baseline, runs a ten-site pilot, and starts the CLAW coordination and the static-address plan. Phase one builds the twelve hubs, with SLA classes set from the pilot's measurements, and no office gets local internet until its security tunnel is up and its boundary change is approved. Phase two moves offices in waves at MPLS renewal, retiring MPLS only after that office's logs reach CLAW. Phase three adds the Microsoft 365 direct path and tracks the five retirement gates. So what does this change?
 Detail: Chapter 11's roadmap and Chapter 13's sequence, with the Catalyst work and the evidence each step leaves (design guidance). Step 0 (Chapter 13), Gate 0: patch to the floor, hunt, harden, log to the SIEM and CLAW, SSO and roles; evidence: gate CSV, hunt artifacts, hardening record, CLAW confirmation. Phase 0, months 0–6 (Chapter 11): decide hosted or on-premises and record the boundary disposition (Chapter 05); set the release baseline; build the fabric in the Portal or the 14 VMs; run the ten-site pilot across tiers and transports; run the paired-branch study (Chapter 13); start the three-party CLAW coordination; plan static edge addresses, including the 5G path; evidence: authorization for regional breakout, 30 days of pilot stability, paired-branch effect size. Step 1, buy the pipe (Chapter 13): order DIA circuits with static addressing and documented path diversity; HSECK9 licenses where encrypted throughput exceeds 250 Mbps; evidence: per-site latency and loss measured before the order. Phase 1, months 6–18: build the 12 hubs (C8500L pairs, hub tunnels to the SSE, and the 24 distribution points on their own servers); build configuration groups and policy groups; set SLA classes from the pilot's measurements; evidence: hubs in production, replacement telemetry confirmed for the pilot sites. Steps 2 and 3, governor before traffic and boundary change before cutover (Chapter 13): no site gets a local-internet action until its SSE tunnel is up and logging, and its boundary change is approved; evidence: approved boundary change dated before cutover, the PEP named per path class. Phase 2, months 18–48: office waves at MPLS renewal (plug-and-play onboarding against the authorized serial list, overlay, cutover); MPLS retired per office only after CLAW parity for that office (Chapters 03 and 11); evidence: per-office CLAW confirmation, the failover test record per site class. Phase 3, months 36+: Microsoft 365 direct path through data policy and Cloud OnRamp categories (no INR in GCC); Connected Cache at the hubs on its own hosts; evidence: the SC-7(4) exception instruments (Appendix A) and the five retirement gates, tracked as Chapter 11 states them (the figure). Two Catalyst specifics in Phase 0: the release baseline, release 20.18 on the control components with IOS XE 17.18 on the edges, at or above the floor (design guidance), for the JWT API (20.18.1), automated private-access tunnels to Secure Access (20.18.2), Manager as the hub for ISE (20.18.2), the Enterprise Certificate option (17.18.1a), a Cisco FIPS letter for the 20.18 control components, and a NIAP listing for Catalyst 8000 hardware on 17.18; Cisco publishes no "recommended release" statement on the pages reviewed, and SDWAN-G's available trains weren't stated (vendor ask 3). And configuration groups, not device templates: Cisco recommends migrating to configuration groups and policy groups; a device can't be on both; some features, including Cloud OnRamp for SaaS and TrustSec, still need legacy templates or a CLI profile, so decide which features force a template before building 1,500 sites. Upgrades follow Cisco's documented procedure for each train hop, with disaster recovery paused, and confirmed paused, before the Manager cluster is upgraded.
 Workbook: Research, Building Book 09's SD-WAN Design on Cisco Catalyst SD-WAN (Build phases mapped to Book 09).</a:t>
             </a:r>
@@ -1310,7 +1310,7 @@
           <a:p>
             <a:r>
               <a:rPr lang="en-US" dirty="0"/>
-              <a:t>[13:01–13:49]  Three findings update Book 09's planning inputs. First, CISA expects a static address on every edge. That conflicts with zero-touch provisioning from dynamic addresses, and probably with the 5G secondary path. It reinforces Book 09's deterministic-egress action, and it belongs in the circuit order. Second, Book 09's cost model assumes an on-premises control plane, while CISA's guidance points to GovCloud. Hosting replaces the fourteen-VM line with a subscription the model doesn't price yet. Third, the catalog keeps growing, with the Validator now in scope and a floor that moves with every addition. And one planning number: about four hundred seventy-six more edges, and the fleet needs a second overlay. Next, the risks.
+              <a:t>[13:04–13:52]  Three findings update Book 09's planning inputs. First, CISA expects a static address on every edge. That conflicts with zero-touch provisioning from dynamic addresses, and probably with the 5G secondary path. It reinforces Book 09's deterministic-egress action, and it belongs in the circuit order. Second, Book 09's cost model assumes an on-premises control plane, while CISA's guidance points to GovCloud. Hosting replaces the fourteen-VM line with a subscription the model doesn't price yet. Third, the catalog keeps growing, with the Validator now in scope and a floor that moves with every addition. And one planning number: about four hundred seventy-six more edges, and the fleet needs a second overlay. Next, the risks.
 Detail: Three findings update Book 09's planning inputs. 1, Static edge addresses: CISA's supplemental guidance asks for a firewall that admits only known edge, Controller, Validator and Manager addresses, and says agencies "will need to assign static IPs" to every edge. That conflicts with zero-touch provisioning from dynamic addresses, and probably with Chapter 11's 5G secondary path. It reinforces Book 09's deterministic-egress action (Chapter 10) (inference). Cisco notes zero-touch onboarding or dynamic edge addresses need "any" on the Validator's UDP 12346; that is the trade to close before Phase 2. Mitigation (design guidance): static DIA addresses in the circuit order; carrier static IPs for 5G or a documented exception for the secondary path; staged onboarding (vendor ask 11 to carriers). 2, The cost model: CISA's hardening guidance points federal users at FedRAMP cloud ("Host Infrastructure in GovCloud"); Chapter 11's cost model assumes an on-premises control plane. This guide recommends Cisco's FedRAMP-certified hosted control plane by default. Hosting replaces Chapter 11's on-premises control-plane line (the 14-VM build) with a subscription the cost model doesn't yet price (vendor ask 3: what does SDWAN-G cost for about 1,524 edges, to replace Chapter 11's $400,000 control-plane line?). 3, KEV growth: the directive's scope has grown since Book 09 recorded it; the catalog now lists nine Catalyst SD-WAN vulnerabilities, Cisco has added the Validator to the advisory for the original authentication bypass, and the newest entry sets today's Manager floor. Re-run the gate's inventory and floor lines on every KEV addition and on each Cisco publication day. Growth trigger: the cluster ceiling is 2,000 devices; about 476 more edges, whether new offices or cloud gateways, would need a second overlay (inference); the risk table puts the growth trigger at about 1,800 devices. Book 09's design doesn't depend on this vendor.
 Workbook: Research, Building Book 09's SD-WAN Design on Cisco Catalyst SD-WAN (What the research found; Hardening; On-premises sizing; Risks).</a:t>
             </a:r>
@@ -1400,7 +1400,7 @@
           <a:p>
             <a:r>
               <a:rPr lang="en-US" dirty="0"/>
-              <a:t>[13:49–14:35]  Two risks are rated high. The control plane collects new exploited flaws faster than most agencies can patch, and a compromise may predate the build. The answers are the hosted fabric with a written patch commitment, or a standing patch crew on Cisco's publication schedule, and hunting before you trust any existing fabric. The medium risks are ones we've met: forensic custody on a hosted fabric, static addressing against zero-touch and 5G, a single-region security service, manual certificate renewal, and unconfirmed edge FIPS status. The vendor asks turn those into questions with owners. Cisco gets most of them; Microsoft, the carriers and CISA get one each. Next, the example code.
+              <a:t>[13:52–14:38]  Two risks are rated high. The control plane collects new exploited flaws faster than most agencies can patch, and a compromise may predate the build. The answers are the hosted fabric with a written patch commitment, or a standing patch crew on Cisco's publication schedule, and hunting before you trust any existing fabric. The medium risks are ones we've met: forensic custody on a hosted fabric, static addressing against zero-touch and 5G, a single-region security service, manual certificate renewal, and unconfirmed edge FIPS status. The vendor asks turn those into questions with owners. Cisco gets most of them; Microsoft, the carriers and CISA get one each. Next, the example code.
 Detail: Risks, with mitigations (design guidance). High: the control plane collects new known-exploited vulnerabilities faster than the agency can patch; mitigation, hosted SDWAN-G with a written patch commitment, otherwise a standing patch crew working to Cisco's publication Wednesdays, re-run the gate on every KEV addition, Live Protect only as a stopgap. High: compromise predates the build (CISA: likely since 2023); hunt before trusting any existing fabric, and rebuild from patched images on any root finding. Medium: the hosted fabric is still in scope and forensic custody depends on Cisco; contract terms for artifact delivery times (vendor ask 2), CLAW and AWS log delivery confirmed in Phase 0. Medium: static-address allow-listing conflicts with ZTP and 5G; static DIA addresses in the circuit order, carrier static IPs for 5G or a documented exception for the secondary path, staged onboarding. Medium: a single-region SSE adds latency to distant offices and concentrates risk; measure in the pilot, fall back to Pattern A at the hubs, consider an SSE with nearer PoPs. Medium: edge certificate renewal is manual after onboarding; CLM inventory plus an alarm-driven runbook, renewal dates tracked like Book 07's other classes. Medium: edge FIPS and Common Criteria status in SD-WAN mode is unconfirmed; vendor commitment before award, avoid TrustSec on FIPS-mode edges. Low: the 2,000-device Manager cluster ceiling; growth trigger at about 1,800 devices, plan a second overlay early. Low: the Sentinel NetFlow path is on an unsupported API; syslog through the agent now, DCR-based flow ingestion when available. Low: configuration groups don't cover every feature; list the template-only features in Phase 0 and keep them on one model per site class. Vendor asks. 1, does Cisco apply every KEV fix to SDWAN-G inside CISA's due dates (the record for CVE-2026-76504 and CVE-2026-20245)? 2, for an SDWAN-G fabric, how quickly will Cisco deliver the ED 26-03 artifacts: disk and memory images, admin-tech files and AWS network logs? 3, Cisco's recommended release today for SDWAN-G and on-premises; is 20.18 or 26.1 available in SDWAN-G; SDWAN-G cost for about 1,524 edges. 4, is 26.2 fixed for the Controller and Validator against CVE-2026-20182, CVE-2026-20245 and CVE-2026-20262? 5, FIPS 140-3 status of IOS XE edges in SD-WAN mode on the C8200L-1N-4T, C8200-1N-4T, C8300-1N1S-4T2X and C8500L-8S4X, and how FIPS mode is enabled on an edge. 6, is controller mode inside the NIAP-evaluated configuration of the 17.15 and 17.18 Catalyst 8000 listings, and which BOM models does each cover? 7, the Enterprise Certificate procedure for overlay edges on 20.18/17.18, and a renewal API for a CLM platform. 8, does Secure Access for Government's automatic tunnel need TAC enablement; is a second US region planned? 9, does Cloud OnRamp for SaaS category steering work against GCC endpoints? 10, Cisco and Microsoft: a Logs ingestion API (data collection rule) path for SD-WAN NetFlow, and is the solution published in Azure Government? 11, carriers: can the 5G secondary path carry a static public address at every office? 12, CISA: must a Catalyst SD-WAN fabric deployed after March 2026 report under ED 26-03, and is the directive still open?
 Workbook: Research, Building Book 09's SD-WAN Design on Cisco Catalyst SD-WAN (Risks; Vendor asks).</a:t>
             </a:r>
@@ -1490,7 +1490,7 @@
           <a:p>
             <a:r>
               <a:rPr lang="en-US" dirty="0"/>
-              <a:t>[14:35–15:24]  The guide comes with a small example, a read-only Python script. It checks every control component against the fixed releases for the directive and the catalog, and writes a gate file that must show no fail or confirm rows. It exports a fleet inventory record per device, and an audit record per audit-log entry, flagging sign-ins and sources outside the management network. It doesn't build path-decision records; those need the policy and statistics reads. And it's read-only on purpose, because of lane discipline: the program observes, the fabric enforces. Be clear about its status, though. It's illustrative: unit-tested against mocked responses, not proven against a live fabric. Finally, what to do with all of this.
+              <a:t>[14:38–15:27]  The guide comes with a small example, a read-only Python script. It checks every control component against the fixed releases for the directive and the catalog, and writes a gate file that must show no fail or confirm rows. It exports a fleet inventory record per device, and an audit record per audit-log entry, flagging sign-ins and sources outside the management network. It doesn't build path-decision records; those need the policy and statistics reads. And it's read-only on purpose, because of lane discipline: the program observes, the fabric enforces. Be clear about its status, though. It's illustrative: unit-tested against mocked responses, not proven against a live fabric. Finally, what to do with all of this.
 Detail: The example code: examples/cisco-sdwan on GitHub. It's a read-only Python script that checks every control component against the fixed releases for the directive and the catalog, and exports inventory and audit-log evidence. It's illustrative: unit-tested against mocked responses, not proven against a live fabric. Sign-in: from release 20.18.1, JSON web tokens through POST /jwt/login, with a duration of up to 604,800 seconds (default 1,800); there's no JWT sign-out, so request short-lived tokens; earlier releases use the session flow. What it builds: the gate findings (ed-26-03-gate.csv must show no fail or confirm rows, gate line 2); a fleet_inventory record per device (CM-8, SI-2), gate line 1; and a management_audit record per audit-log entry (AU-6, AU-9, AC-6(9)), flagged for sign-ins and for sources outside the management network. It doesn't build sdwan_decision records; those need the policy and statistics reads. Lane discipline: the program observes, reconciles and emits evidence; Manager and the Controllers route and enforce; the example script is read-only for that reason. Couldn't verify: the audit-log query's last_n_hours was tested only against mocked responses.
 Workbook: Research, Building Book 09's SD-WAN Design on Cisco Catalyst SD-WAN (The example code; Evidence and telemetry; Lane discipline; What couldn't be verified).</a:t>
             </a:r>
@@ -1670,8 +1670,8 @@
           <a:p>
             <a:r>
               <a:rPr lang="en-US" dirty="0"/>
-              <a:t>[15:24–16:11]  To move this guide from under review to proved, build the gate and the ten-site pilot in a lab or a pilot fabric, run the example script against it, and record the evidence. Some things couldn't be verified, like a Cisco recommended release and edge FIPS status in SD-WAN mode, so confirm those with Cisco. The decisions are hosted or on-premises, the release baseline, static addressing, which security service, and the renewal runbook. For why the program builds on this platform, read the SD-WAN platform deep dive. For the design itself, read Book 09's chapters on governed transport and the field-office transformation, or watch the SD-WAN technical deck. Thanks for listening.
-Detail: Status: in review. Every claim was checked on October 24, 2026, against CISA's ED 26-03 pages and KEV catalog; Cisco's security advisories, hardening guide, configuration guides, sizing chapter, government guide, certification pages and DevNet references; the Cisco Secure Access for Government help center; FedRAMP Marketplace data, the NIST CMVP, the NIAP Product Compliant List and the DISA STIG library; and Microsoft Learn. To move this guide to Proved: build Gate 0 and the ten-site pilot in a lab or pilot fabric, run the example script against it, and record the evidence on the page. What couldn't be verified includes a Cisco "recommended release" statement and the trains available in SDWAN-G, and SD-WAN mode in edge FIPS validation and NIAP's evaluated configurations (full list on the backup slide). Decisions (design guidance): hosted or on-premises; the release baseline at or above the floor; static edge addressing, including the 5G path; which SSE; and the certificate renewal runbook on the CLM platform. Read next: SD-WAN and SASE Platforms Against Book 09's Requirements, the product deep dive on why the program builds on Cisco Catalyst SD-WAN under stated conditions; Book 09, Chapter 05 (SD-WAN, SASE and governed transport) and Chapter 11 (field-office WAN transformation); and the Book 09 SD-WAN technical deep-dive deck. Related: Book 07 — PKI &amp; Certificates, the implementation guide Certificate Lifecycle on CyberArk Certificate Manager, and Book 08, Chapter 05 on DNS at the SD-WAN edge. The page names one vendor to illustrate Book 09's vendor-neutral design; it isn't an endorsement by any agency. Comments and corrections are welcome as issues on GitHub.
+              <a:t>[15:27–16:14]  To move this guide from under review to proved, build the gate and the ten-site pilot in a lab or a pilot fabric, run the example script against it, and record the evidence. Some things couldn't be verified, like a Cisco recommended release and edge FIPS status in SD-WAN mode, so confirm those with Cisco. The decisions are hosted or on-premises, the release baseline, static addressing, which security service, and the renewal runbook. For why the program builds on this platform, read the SD-WAN platform deep dive. For the design itself, read Book 09's chapters on governed transport and the field-office transformation, or watch the SD-WAN technical deck. Thanks for listening.
+Detail: Status: in review. Every claim was checked on October 24, 2026, against CISA's ED 26-03 pages and KEV catalog; Cisco's security advisories, hardening guide, configuration guides, sizing chapter, government guide, certification pages and DevNet references; the Cisco Secure Access for Government help center; FedRAMP Marketplace data, the NIST CMVP, the NIAP Product Compliant List and the DISA STIG library; and Microsoft Learn. The configuration-baseline facts (NIST CM-6, the CIS Benchmarks list and Cisco's IOS XE hardening guide) were added on October 29, 2026. To move this guide to Proved: build Gate 0 and the ten-site pilot in a lab or pilot fabric, run the example script against it, and record the evidence on the page. What couldn't be verified includes a Cisco "recommended release" statement and the trains available in SDWAN-G, and SD-WAN mode in edge FIPS validation and NIAP's evaluated configurations (full list on the backup slide). Decisions (design guidance): hosted or on-premises; the release baseline at or above the floor; static edge addressing, including the 5G path; which SSE; and the certificate renewal runbook on the CLM platform. Read next: SD-WAN and SASE Platforms Against Book 09's Requirements, the product deep dive on why the program builds on Cisco Catalyst SD-WAN under stated conditions; Book 09, Chapter 05 (SD-WAN, SASE and governed transport) and Chapter 11 (field-office WAN transformation); and the Book 09 SD-WAN technical deep-dive deck. Related: Book 07 — PKI &amp; Certificates, the implementation guide Certificate Lifecycle on CyberArk Certificate Manager, and Book 08, Chapter 05 on DNS at the SD-WAN edge. The page names one vendor to illustrate Book 09's vendor-neutral design; it isn't an endorsement by any agency. Comments and corrections are welcome as issues on GitHub.
 Workbook: Research, Building Book 09's SD-WAN Design on Cisco Catalyst SD-WAN (Status and review; Related).</a:t>
             </a:r>
             <a:endParaRPr lang="en-US" dirty="0"/>
@@ -6964,7 +6964,7 @@
                           <a:ea typeface="Calibri" pitchFamily="34" charset="-122"/>
                           <a:cs typeface="Calibri" pitchFamily="34" charset="-120"/>
                         </a:rPr>
-                        <a:t>DISA STIGs</a:t>
+                        <a:t>Configuration baseline (CM-6)</a:t>
                       </a:r>
                       <a:endParaRPr lang="en-US" sz="1200" dirty="0">
                         <a:latin typeface="Calibri" charset="0"/>
@@ -7032,7 +7032,7 @@
                           <a:ea typeface="Calibri" pitchFamily="34" charset="-122"/>
                           <a:cs typeface="Calibri" pitchFamily="34" charset="-120"/>
                         </a:rPr>
-                        <a:t>No SD-WAN STIG; IOS XE Router NDM and RTR STIGs don't mention SD-WAN mode: a reference baseline, not a checklist (inference)</a:t>
+                        <a:t>Edges: CIS Cisco IOS XE 17.x Benchmark plus Cisco's IOS XE Hardening Guide, checked against SD-WAN mode (design guidance). No SD-WAN STIG; IOS XE router STIGs: optional cross-check, High only</a:t>
                       </a:r>
                       <a:endParaRPr lang="en-US" sz="1200" dirty="0">
                         <a:latin typeface="Calibri" charset="0"/>
@@ -7266,7 +7266,7 @@
                   <a:srgbClr val="64748B"/>
                 </a:solidFill>
               </a:rPr>
-              <a:t>Sources: Cisco FIPS 140 and Common Criteria pages; NIST CMVP #4747, #5356, #5430; NIAP PCL; Cisco Hardening Guide; Security Config Guide 17.x; DISA STIG library. Oct 24, 2026.</a:t>
+              <a:t>Sources: Cisco FIPS and CC pages; NIST CMVP #4747, #5356, #5430; NIAP PCL; Cisco SD-WAN and IOS XE hardening guides; NIST CM-6; CIS Benchmarks; DISA STIG library.</a:t>
             </a:r>
             <a:endParaRPr lang="en-US" sz="1000" dirty="0"/>
           </a:p>
@@ -18901,7 +18901,7 @@
                   <a:schemeClr val="tx2"/>
                 </a:solidFill>
               </a:rPr>
-              <a:t>The DoDIN Approved Products List entry, if any.</a:t>
+              <a:t>The DoDIN Approved Products List entry, if any (High only).</a:t>
             </a:r>
             <a:endParaRPr lang="en-US" sz="1300" dirty="0"/>
           </a:p>
@@ -19232,7 +19232,7 @@
                   <a:schemeClr val="tx2"/>
                 </a:solidFill>
               </a:rPr>
-              <a:t>NIST CMVP certificates #4747, #5356 and #5430; NIAP Product Compliant List; Cisco FIPS 140 and Common Criteria pages; DISA STIG library (Cisco IOS XE Router STIG bundle).</a:t>
+              <a:t>NIST CMVP certificates #4747, #5356 and #5430; NIAP Product Compliant List; Cisco FIPS 140 and Common Criteria pages; NIST SP 800-53 CM-6; CIS Benchmarks (Cisco IOS XE 17.x); Cisco IOS XE Software Hardening Guide (rev. 3.2); DISA STIG library (Cisco IOS XE Router STIG bundle; High only).</a:t>
             </a:r>
             <a:endParaRPr lang="en-US" sz="1200" dirty="0"/>
           </a:p>
